--- a/Documents/Presentation/Project Update/Project Update 3 (week5 & 6).pptx
+++ b/Documents/Presentation/Project Update/Project Update 3 (week5 & 6).pptx
@@ -4015,7 +4015,7 @@
             <p:ph idx="1"/>
             <p:extLst>
               <p:ext uri="{D42A27DB-BD31-4B8C-83A1-F6EECF244321}">
-                <p14:modId xmlns:p14="http://schemas.microsoft.com/office/powerpoint/2010/main" val="4280972871"/>
+                <p14:modId xmlns:p14="http://schemas.microsoft.com/office/powerpoint/2010/main" val="4199179944"/>
               </p:ext>
             </p:extLst>
           </p:nvPr>
@@ -4331,6 +4331,9 @@
                       </a:pPr>
                       <a:r>
                         <a:rPr lang="en-US" sz="1400" u="none" strike="noStrike" dirty="0">
+                          <a:solidFill>
+                            <a:srgbClr val="0070C0"/>
+                          </a:solidFill>
                           <a:effectLst/>
                           <a:latin typeface="Candara" panose="020E0502030303020204" pitchFamily="34" charset="0"/>
                         </a:rPr>
@@ -4338,7 +4341,7 @@
                       </a:r>
                       <a:endParaRPr lang="en-US" sz="1400" b="1" i="0" u="none" strike="noStrike" dirty="0">
                         <a:solidFill>
-                          <a:srgbClr val="000000"/>
+                          <a:srgbClr val="0070C0"/>
                         </a:solidFill>
                         <a:effectLst/>
                         <a:latin typeface="Candara" panose="020E0502030303020204" pitchFamily="34" charset="0"/>
@@ -4357,6 +4360,9 @@
                       </a:pPr>
                       <a:r>
                         <a:rPr lang="en-US" sz="1400" u="none" strike="noStrike" dirty="0">
+                          <a:solidFill>
+                            <a:srgbClr val="0070C0"/>
+                          </a:solidFill>
                           <a:effectLst/>
                           <a:latin typeface="Candara" panose="020E0502030303020204" pitchFamily="34" charset="0"/>
                         </a:rPr>
@@ -4364,7 +4370,7 @@
                       </a:r>
                       <a:endParaRPr lang="en-US" sz="1400" b="0" i="0" u="none" strike="noStrike" dirty="0">
                         <a:solidFill>
-                          <a:srgbClr val="000000"/>
+                          <a:srgbClr val="0070C0"/>
                         </a:solidFill>
                         <a:effectLst/>
                         <a:latin typeface="Candara" panose="020E0502030303020204" pitchFamily="34" charset="0"/>
@@ -4383,6 +4389,9 @@
                       </a:pPr>
                       <a:r>
                         <a:rPr lang="en-US" sz="1400" u="none" strike="noStrike">
+                          <a:solidFill>
+                            <a:srgbClr val="0070C0"/>
+                          </a:solidFill>
                           <a:effectLst/>
                           <a:latin typeface="Candara" panose="020E0502030303020204" pitchFamily="34" charset="0"/>
                         </a:rPr>
@@ -4390,7 +4399,7 @@
                       </a:r>
                       <a:endParaRPr lang="en-US" sz="1400" b="0" i="0" u="none" strike="noStrike">
                         <a:solidFill>
-                          <a:srgbClr val="000000"/>
+                          <a:srgbClr val="0070C0"/>
                         </a:solidFill>
                         <a:effectLst/>
                         <a:latin typeface="Candara" panose="020E0502030303020204" pitchFamily="34" charset="0"/>
@@ -4409,6 +4418,9 @@
                       </a:pPr>
                       <a:r>
                         <a:rPr lang="en-US" sz="1400" u="none" strike="noStrike" dirty="0">
+                          <a:solidFill>
+                            <a:srgbClr val="0070C0"/>
+                          </a:solidFill>
                           <a:effectLst/>
                           <a:latin typeface="Candara" panose="020E0502030303020204" pitchFamily="34" charset="0"/>
                         </a:rPr>
@@ -4416,7 +4428,7 @@
                       </a:r>
                       <a:endParaRPr lang="en-US" sz="1400" b="1" i="0" u="none" strike="noStrike" dirty="0">
                         <a:solidFill>
-                          <a:srgbClr val="000000"/>
+                          <a:srgbClr val="0070C0"/>
                         </a:solidFill>
                         <a:effectLst/>
                         <a:latin typeface="Candara" panose="020E0502030303020204" pitchFamily="34" charset="0"/>
@@ -4435,6 +4447,9 @@
                       </a:pPr>
                       <a:r>
                         <a:rPr lang="en-US" sz="1400" u="none" strike="noStrike">
+                          <a:solidFill>
+                            <a:srgbClr val="0070C0"/>
+                          </a:solidFill>
                           <a:effectLst/>
                           <a:latin typeface="Candara" panose="020E0502030303020204" pitchFamily="34" charset="0"/>
                         </a:rPr>
@@ -4442,7 +4457,7 @@
                       </a:r>
                       <a:endParaRPr lang="en-US" sz="1400" b="1" i="0" u="none" strike="noStrike">
                         <a:solidFill>
-                          <a:srgbClr val="000000"/>
+                          <a:srgbClr val="0070C0"/>
                         </a:solidFill>
                         <a:effectLst/>
                         <a:latin typeface="Candara" panose="020E0502030303020204" pitchFamily="34" charset="0"/>
@@ -4461,6 +4476,9 @@
                       </a:pPr>
                       <a:r>
                         <a:rPr lang="en-US" sz="1400" u="none" strike="noStrike">
+                          <a:solidFill>
+                            <a:srgbClr val="0070C0"/>
+                          </a:solidFill>
                           <a:effectLst/>
                           <a:latin typeface="Candara" panose="020E0502030303020204" pitchFamily="34" charset="0"/>
                         </a:rPr>
@@ -4468,7 +4486,7 @@
                       </a:r>
                       <a:endParaRPr lang="en-US" sz="1400" b="0" i="0" u="none" strike="noStrike">
                         <a:solidFill>
-                          <a:srgbClr val="000000"/>
+                          <a:srgbClr val="0070C0"/>
                         </a:solidFill>
                         <a:effectLst/>
                         <a:latin typeface="Candara" panose="020E0502030303020204" pitchFamily="34" charset="0"/>
@@ -4493,15 +4511,18 @@
                         <a:buNone/>
                       </a:pPr>
                       <a:r>
-                        <a:rPr lang="en-US" sz="1400" u="none" strike="noStrike">
+                        <a:rPr lang="en-US" sz="1400" u="none" strike="noStrike" dirty="0">
+                          <a:solidFill>
+                            <a:srgbClr val="0070C0"/>
+                          </a:solidFill>
                           <a:effectLst/>
                           <a:latin typeface="Candara" panose="020E0502030303020204" pitchFamily="34" charset="0"/>
                         </a:rPr>
                         <a:t>Week 3–4</a:t>
                       </a:r>
-                      <a:endParaRPr lang="en-US" sz="1400" b="1" i="0" u="none" strike="noStrike">
+                      <a:endParaRPr lang="en-US" sz="1400" b="1" i="0" u="none" strike="noStrike" dirty="0">
                         <a:solidFill>
-                          <a:srgbClr val="000000"/>
+                          <a:srgbClr val="0070C0"/>
                         </a:solidFill>
                         <a:effectLst/>
                         <a:latin typeface="Candara" panose="020E0502030303020204" pitchFamily="34" charset="0"/>
@@ -4520,6 +4541,9 @@
                       </a:pPr>
                       <a:r>
                         <a:rPr lang="en-US" sz="1400" u="none" strike="noStrike" dirty="0">
+                          <a:solidFill>
+                            <a:srgbClr val="0070C0"/>
+                          </a:solidFill>
                           <a:effectLst/>
                           <a:latin typeface="Candara" panose="020E0502030303020204" pitchFamily="34" charset="0"/>
                         </a:rPr>
@@ -4527,7 +4551,7 @@
                       </a:r>
                       <a:endParaRPr lang="en-US" sz="1400" b="0" i="0" u="none" strike="noStrike" dirty="0">
                         <a:solidFill>
-                          <a:srgbClr val="000000"/>
+                          <a:srgbClr val="0070C0"/>
                         </a:solidFill>
                         <a:effectLst/>
                         <a:latin typeface="Candara" panose="020E0502030303020204" pitchFamily="34" charset="0"/>
@@ -4546,6 +4570,9 @@
                       </a:pPr>
                       <a:r>
                         <a:rPr lang="en-US" sz="1400" u="none" strike="noStrike">
+                          <a:solidFill>
+                            <a:srgbClr val="0070C0"/>
+                          </a:solidFill>
                           <a:effectLst/>
                           <a:latin typeface="Candara" panose="020E0502030303020204" pitchFamily="34" charset="0"/>
                         </a:rPr>
@@ -4553,7 +4580,7 @@
                       </a:r>
                       <a:endParaRPr lang="en-US" sz="1400" b="0" i="0" u="none" strike="noStrike">
                         <a:solidFill>
-                          <a:srgbClr val="000000"/>
+                          <a:srgbClr val="0070C0"/>
                         </a:solidFill>
                         <a:effectLst/>
                         <a:latin typeface="Candara" panose="020E0502030303020204" pitchFamily="34" charset="0"/>
@@ -4572,6 +4599,9 @@
                       </a:pPr>
                       <a:r>
                         <a:rPr lang="en-US" sz="1400" u="none" strike="noStrike" dirty="0">
+                          <a:solidFill>
+                            <a:srgbClr val="0070C0"/>
+                          </a:solidFill>
                           <a:effectLst/>
                           <a:latin typeface="Candara" panose="020E0502030303020204" pitchFamily="34" charset="0"/>
                         </a:rPr>
@@ -4579,7 +4609,7 @@
                       </a:r>
                       <a:endParaRPr lang="en-US" sz="1400" b="1" i="0" u="none" strike="noStrike" dirty="0">
                         <a:solidFill>
-                          <a:srgbClr val="000000"/>
+                          <a:srgbClr val="0070C0"/>
                         </a:solidFill>
                         <a:effectLst/>
                         <a:latin typeface="Candara" panose="020E0502030303020204" pitchFamily="34" charset="0"/>
@@ -4598,6 +4628,9 @@
                       </a:pPr>
                       <a:r>
                         <a:rPr lang="en-US" sz="1400" u="none" strike="noStrike">
+                          <a:solidFill>
+                            <a:srgbClr val="0070C0"/>
+                          </a:solidFill>
                           <a:effectLst/>
                           <a:latin typeface="Candara" panose="020E0502030303020204" pitchFamily="34" charset="0"/>
                         </a:rPr>
@@ -4605,7 +4638,7 @@
                       </a:r>
                       <a:endParaRPr lang="en-US" sz="1400" b="1" i="0" u="none" strike="noStrike">
                         <a:solidFill>
-                          <a:srgbClr val="000000"/>
+                          <a:srgbClr val="0070C0"/>
                         </a:solidFill>
                         <a:effectLst/>
                         <a:latin typeface="Candara" panose="020E0502030303020204" pitchFamily="34" charset="0"/>
@@ -4623,15 +4656,18 @@
                         <a:buNone/>
                       </a:pPr>
                       <a:r>
-                        <a:rPr lang="en-US" sz="1400" u="none" strike="noStrike">
+                        <a:rPr lang="en-US" sz="1400" u="none" strike="noStrike" dirty="0">
+                          <a:solidFill>
+                            <a:srgbClr val="0070C0"/>
+                          </a:solidFill>
                           <a:effectLst/>
                           <a:latin typeface="Candara" panose="020E0502030303020204" pitchFamily="34" charset="0"/>
                         </a:rPr>
                         <a:t>SQL schema designed; EF Core entities &amp; migrations applied; seed/test data loaded.</a:t>
                       </a:r>
-                      <a:endParaRPr lang="en-US" sz="1400" b="0" i="0" u="none" strike="noStrike">
+                      <a:endParaRPr lang="en-US" sz="1400" b="0" i="0" u="none" strike="noStrike" dirty="0">
                         <a:solidFill>
-                          <a:srgbClr val="000000"/>
+                          <a:srgbClr val="0070C0"/>
                         </a:solidFill>
                         <a:effectLst/>
                         <a:latin typeface="Candara" panose="020E0502030303020204" pitchFamily="34" charset="0"/>
